--- a/STARLAB_Slide_Decks_All/08_Troubleshooting_Responsible_Project_Pivots.pptx
+++ b/STARLAB_Slide_Decks_All/08_Troubleshooting_Responsible_Project_Pivots.pptx
@@ -2,38 +2,38 @@
 <file path=ppt/presentation.xml><?xml version="1.0" encoding="utf-8"?>
 <p:presentation xmlns:p="http://schemas.openxmlformats.org/presentationml/2006/main" embedTrueTypeFonts="1" saveSubsetFonts="0">
   <p:sldMasterIdLst>
-    <p:sldMasterId xmlns:r="http://schemas.openxmlformats.org/officeDocument/2006/relationships" id="2147483648" r:id="R106a4e1320db4c0e"/>
+    <p:sldMasterId xmlns:r="http://schemas.openxmlformats.org/officeDocument/2006/relationships" id="2147483648" r:id="Re4ed2e2cb32a4d2b"/>
   </p:sldMasterIdLst>
   <p:notesMasterIdLst>
-    <p:notesMasterId xmlns:r="http://schemas.openxmlformats.org/officeDocument/2006/relationships" r:id="R10a3eca4bc90424a"/>
+    <p:notesMasterId xmlns:r="http://schemas.openxmlformats.org/officeDocument/2006/relationships" r:id="R19933fbf0a17410d"/>
   </p:notesMasterIdLst>
   <p:sldIdLst>
-    <p:sldId xmlns:r="http://schemas.openxmlformats.org/officeDocument/2006/relationships" id="256" r:id="Ra124b1f3f7284cea"/>
-    <p:sldId xmlns:r="http://schemas.openxmlformats.org/officeDocument/2006/relationships" id="257" r:id="R3eae6174e4d147b5"/>
-    <p:sldId xmlns:r="http://schemas.openxmlformats.org/officeDocument/2006/relationships" id="258" r:id="Rc0c1a669402d43c6"/>
-    <p:sldId xmlns:r="http://schemas.openxmlformats.org/officeDocument/2006/relationships" id="259" r:id="Rb43385a160d2491b"/>
-    <p:sldId xmlns:r="http://schemas.openxmlformats.org/officeDocument/2006/relationships" id="260" r:id="R29c66b3aeb644f98"/>
-    <p:sldId xmlns:r="http://schemas.openxmlformats.org/officeDocument/2006/relationships" id="261" r:id="R6ca3846d20cd489c"/>
-    <p:sldId xmlns:r="http://schemas.openxmlformats.org/officeDocument/2006/relationships" id="262" r:id="R44177ebd835f4a4a"/>
-    <p:sldId xmlns:r="http://schemas.openxmlformats.org/officeDocument/2006/relationships" id="263" r:id="R55e3ce5bfc8d4278"/>
-    <p:sldId xmlns:r="http://schemas.openxmlformats.org/officeDocument/2006/relationships" id="264" r:id="R90e4a098172a4be2"/>
-    <p:sldId xmlns:r="http://schemas.openxmlformats.org/officeDocument/2006/relationships" id="265" r:id="R1c440e10ce194150"/>
-    <p:sldId xmlns:r="http://schemas.openxmlformats.org/officeDocument/2006/relationships" id="266" r:id="R8aaeee2f93a84e5d"/>
-    <p:sldId xmlns:r="http://schemas.openxmlformats.org/officeDocument/2006/relationships" id="267" r:id="R689cdbc0ad794bdc"/>
-    <p:sldId xmlns:r="http://schemas.openxmlformats.org/officeDocument/2006/relationships" id="268" r:id="R43f5f6c665ed47ff"/>
-    <p:sldId xmlns:r="http://schemas.openxmlformats.org/officeDocument/2006/relationships" id="269" r:id="R94e8b8555d284181"/>
-    <p:sldId xmlns:r="http://schemas.openxmlformats.org/officeDocument/2006/relationships" id="270" r:id="R20c064eb912b43b7"/>
-    <p:sldId xmlns:r="http://schemas.openxmlformats.org/officeDocument/2006/relationships" id="271" r:id="Rdd1d94e013e141a4"/>
-    <p:sldId xmlns:r="http://schemas.openxmlformats.org/officeDocument/2006/relationships" id="272" r:id="R92726f93a02e42f5"/>
-    <p:sldId xmlns:r="http://schemas.openxmlformats.org/officeDocument/2006/relationships" id="273" r:id="Rf525a8944fc34bb9"/>
+    <p:sldId xmlns:r="http://schemas.openxmlformats.org/officeDocument/2006/relationships" id="256" r:id="Rccbfe61f926c4a0d"/>
+    <p:sldId xmlns:r="http://schemas.openxmlformats.org/officeDocument/2006/relationships" id="257" r:id="Rf55eb18076794f6f"/>
+    <p:sldId xmlns:r="http://schemas.openxmlformats.org/officeDocument/2006/relationships" id="258" r:id="Re5400dc2ab744fb6"/>
+    <p:sldId xmlns:r="http://schemas.openxmlformats.org/officeDocument/2006/relationships" id="259" r:id="R8caeaab370d348b2"/>
+    <p:sldId xmlns:r="http://schemas.openxmlformats.org/officeDocument/2006/relationships" id="260" r:id="Rd84945e887854856"/>
+    <p:sldId xmlns:r="http://schemas.openxmlformats.org/officeDocument/2006/relationships" id="261" r:id="Rcc5a4f694f7c433e"/>
+    <p:sldId xmlns:r="http://schemas.openxmlformats.org/officeDocument/2006/relationships" id="262" r:id="Rf8b72625c35d4bae"/>
+    <p:sldId xmlns:r="http://schemas.openxmlformats.org/officeDocument/2006/relationships" id="263" r:id="R481883697d074128"/>
+    <p:sldId xmlns:r="http://schemas.openxmlformats.org/officeDocument/2006/relationships" id="264" r:id="R62271538af824221"/>
+    <p:sldId xmlns:r="http://schemas.openxmlformats.org/officeDocument/2006/relationships" id="265" r:id="R42b9a34026db4381"/>
+    <p:sldId xmlns:r="http://schemas.openxmlformats.org/officeDocument/2006/relationships" id="266" r:id="Rf5d0a2701892425d"/>
+    <p:sldId xmlns:r="http://schemas.openxmlformats.org/officeDocument/2006/relationships" id="267" r:id="R861f0788562143ad"/>
+    <p:sldId xmlns:r="http://schemas.openxmlformats.org/officeDocument/2006/relationships" id="268" r:id="Rc0de1816adb0407d"/>
+    <p:sldId xmlns:r="http://schemas.openxmlformats.org/officeDocument/2006/relationships" id="269" r:id="Rd3726dd03a014811"/>
+    <p:sldId xmlns:r="http://schemas.openxmlformats.org/officeDocument/2006/relationships" id="270" r:id="R28ab8c6f0fa44991"/>
+    <p:sldId xmlns:r="http://schemas.openxmlformats.org/officeDocument/2006/relationships" id="271" r:id="Rd34f8cef5f624d67"/>
+    <p:sldId xmlns:r="http://schemas.openxmlformats.org/officeDocument/2006/relationships" id="272" r:id="Rf1f5533838114fa8"/>
+    <p:sldId xmlns:r="http://schemas.openxmlformats.org/officeDocument/2006/relationships" id="273" r:id="R5c50f1d80b8c4b5a"/>
   </p:sldIdLst>
   <p:sldSz cx="12192000" cy="6858000"/>
   <p:notesSz cx="6858000" cy="9144000"/>
   <p:embeddedFontLst>
     <p:embeddedFont>
       <p:font typeface="Play"/>
-      <p:regular xmlns:r="http://schemas.openxmlformats.org/officeDocument/2006/relationships" r:id="R81576c08fb3b4a00"/>
-      <p:bold xmlns:r="http://schemas.openxmlformats.org/officeDocument/2006/relationships" r:id="Rc4a07078ed944921"/>
+      <p:regular xmlns:r="http://schemas.openxmlformats.org/officeDocument/2006/relationships" r:id="R8bcd08a5e72945f9"/>
+      <p:bold xmlns:r="http://schemas.openxmlformats.org/officeDocument/2006/relationships" r:id="R09f421b1349743ea"/>
     </p:embeddedFont>
   </p:embeddedFontLst>
   <p:defaultTextStyle>
@@ -653,6 +653,60 @@
             </a:pPr>
             <a:r>
               <a:rPr b="1"/>
+              <a:t>REVISIT / REFERENCE</a:t>
+            </a:r>
+          </a:p>
+          <a:p xmlns:a="http://schemas.openxmlformats.org/drawingml/2006/main">
+            <a:pPr marL="457200" marR="0" indent="-228600" algn="l">
+              <a:lnSpc>
+                <a:spcPct val="100000"/>
+              </a:lnSpc>
+              <a:spcBef>
+                <a:spcPts val="0"/>
+              </a:spcBef>
+              <a:spcAft>
+                <a:spcPts val="0"/>
+              </a:spcAft>
+              <a:buSzPts val="1400"/>
+              <a:buNone/>
+            </a:pPr>
+            <a:r>
+              <a:t>Unit 3, Weeks 7, 10, and 13</a:t>
+            </a:r>
+          </a:p>
+          <a:p xmlns:a="http://schemas.openxmlformats.org/drawingml/2006/main">
+            <a:pPr marL="457200" marR="0" indent="-228600" algn="l">
+              <a:lnSpc>
+                <a:spcPct val="100000"/>
+              </a:lnSpc>
+              <a:spcBef>
+                <a:spcPts val="0"/>
+              </a:spcBef>
+              <a:spcAft>
+                <a:spcPts val="0"/>
+              </a:spcAft>
+              <a:buSzPts val="1400"/>
+              <a:buNone/>
+            </a:pPr>
+            <a:r>
+              <a:t/>
+            </a:r>
+          </a:p>
+          <a:p xmlns:a="http://schemas.openxmlformats.org/drawingml/2006/main">
+            <a:pPr marL="457200" marR="0" indent="-228600" algn="l">
+              <a:lnSpc>
+                <a:spcPct val="100000"/>
+              </a:lnSpc>
+              <a:spcBef>
+                <a:spcPts val="0"/>
+              </a:spcBef>
+              <a:spcAft>
+                <a:spcPts val="0"/>
+              </a:spcAft>
+              <a:buSzPts val="1400"/>
+              <a:buNone/>
+            </a:pPr>
+            <a:r>
               <a:t>REQUIRED WEEK 6 MATERIALS</a:t>
             </a:r>
           </a:p>
@@ -671,11 +725,11 @@
               <a:buNone/>
             </a:pPr>
             <a:r>
-              <a:t>- Unit 3 Student Handout 4: Pilot Test Reflection and Troubleshooting Log</a:t>
-            </a:r>
-          </a:p>
-          <a:p xmlns:a="http://schemas.openxmlformats.org/drawingml/2006/main">
-            <a:pPr marL="457200" marR="0" indent="-228600" algn="l">
+              <a:t>- Unit 3 Student Handouts 4-5</a:t>
+            </a:r>
+          </a:p>
+          <a:p xmlns:a="http://schemas.openxmlformats.org/drawingml/2006/main">
+            <a:pPr marL="228600" marR="0" indent="0" algn="l">
               <a:lnSpc>
                 <a:spcPct val="100000"/>
               </a:lnSpc>
@@ -689,11 +743,11 @@
               <a:buNone/>
             </a:pPr>
             <a:r>
-              <a:t>- Unit 3 Student Handout 5: Method Revision Decision Chart</a:t>
-            </a:r>
-          </a:p>
-          <a:p xmlns:a="http://schemas.openxmlformats.org/drawingml/2006/main">
-            <a:pPr marL="457200" marR="0" indent="-228600" algn="l">
+              <a:t>- Unit 3 Appendices D-E</a:t>
+            </a:r>
+          </a:p>
+          <a:p xmlns:a="http://schemas.openxmlformats.org/drawingml/2006/main">
+            <a:pPr marL="228600" marR="0" indent="0" algn="l">
               <a:lnSpc>
                 <a:spcPct val="100000"/>
               </a:lnSpc>
@@ -707,11 +761,11 @@
               <a:buNone/>
             </a:pPr>
             <a:r>
-              <a:t>- Unit 3 Appendix D: Types of Research Problems</a:t>
-            </a:r>
-          </a:p>
-          <a:p xmlns:a="http://schemas.openxmlformats.org/drawingml/2006/main">
-            <a:pPr marL="457200" marR="0" indent="-228600" algn="l">
+              <a:t/>
+            </a:r>
+          </a:p>
+          <a:p xmlns:a="http://schemas.openxmlformats.org/drawingml/2006/main">
+            <a:pPr marL="228600" marR="0" indent="0" algn="l">
               <a:lnSpc>
                 <a:spcPct val="100000"/>
               </a:lnSpc>
@@ -725,7 +779,7 @@
               <a:buNone/>
             </a:pPr>
             <a:r>
-              <a:t>- Unit 3 Appendix E: Troubleshooting Sentence Frames</a:t>
+              <a:t>WEEK 7 REVISIT MATERIALS</a:t>
             </a:r>
           </a:p>
           <a:p xmlns:a="http://schemas.openxmlformats.org/drawingml/2006/main">
@@ -743,6 +797,42 @@
               <a:buNone/>
             </a:pPr>
             <a:r>
+              <a:t>- Unit 3 Student Handouts 6-7</a:t>
+            </a:r>
+          </a:p>
+          <a:p xmlns:a="http://schemas.openxmlformats.org/drawingml/2006/main">
+            <a:pPr marL="228600" marR="0" indent="0" algn="l">
+              <a:lnSpc>
+                <a:spcPct val="100000"/>
+              </a:lnSpc>
+              <a:spcBef>
+                <a:spcPts val="0"/>
+              </a:spcBef>
+              <a:spcAft>
+                <a:spcPts val="0"/>
+              </a:spcAft>
+              <a:buSzPts val="1400"/>
+              <a:buNone/>
+            </a:pPr>
+            <a:r>
+              <a:t>- Unit 3 Appendices F-G</a:t>
+            </a:r>
+          </a:p>
+          <a:p xmlns:a="http://schemas.openxmlformats.org/drawingml/2006/main">
+            <a:pPr marL="228600" marR="0" indent="0" algn="l">
+              <a:lnSpc>
+                <a:spcPct val="100000"/>
+              </a:lnSpc>
+              <a:spcBef>
+                <a:spcPts val="0"/>
+              </a:spcBef>
+              <a:spcAft>
+                <a:spcPts val="0"/>
+              </a:spcAft>
+              <a:buSzPts val="1400"/>
+              <a:buNone/>
+            </a:pPr>
+            <a:r>
               <a:t/>
             </a:r>
           </a:p>
@@ -761,7 +851,7 @@
               <a:buNone/>
             </a:pPr>
             <a:r>
-              <a:t>REVISIT / SECONDARY USE</a:t>
+              <a:t>WEEK 10 REVISIT MATERIALS</a:t>
             </a:r>
           </a:p>
           <a:p xmlns:a="http://schemas.openxmlformats.org/drawingml/2006/main">
@@ -779,7 +869,7 @@
               <a:buNone/>
             </a:pPr>
             <a:r>
-              <a:t>Week 7 required: Student Handouts 6-7; Appendices F-G</a:t>
+              <a:t>- Unit 3 Student Handouts 11-12</a:t>
             </a:r>
           </a:p>
           <a:p xmlns:a="http://schemas.openxmlformats.org/drawingml/2006/main">
@@ -797,7 +887,7 @@
               <a:buNone/>
             </a:pPr>
             <a:r>
-              <a:t>Week 10 required: Student Handouts 11-12</a:t>
+              <a:t>- Unit 3 Appendices K-L are optional / teacher reference</a:t>
             </a:r>
           </a:p>
           <a:p xmlns:a="http://schemas.openxmlformats.org/drawingml/2006/main">
@@ -815,7 +905,7 @@
               <a:buNone/>
             </a:pPr>
             <a:r>
-              <a:t>Week 10 optional / teacher reference: Appendices K-L</a:t>
+              <a:t/>
             </a:r>
           </a:p>
           <a:p xmlns:a="http://schemas.openxmlformats.org/drawingml/2006/main">
@@ -833,7 +923,7 @@
               <a:buNone/>
             </a:pPr>
             <a:r>
-              <a:t>Week 13 required: Student Handouts 9 and 15</a:t>
+              <a:t>WEEK 13 REVISIT MATERIALS</a:t>
             </a:r>
           </a:p>
           <a:p xmlns:a="http://schemas.openxmlformats.org/drawingml/2006/main">
@@ -851,7 +941,7 @@
               <a:buNone/>
             </a:pPr>
             <a:r>
-              <a:t>Week 13 optional / teacher reference: Appendix P</a:t>
+              <a:t>- Unit 3 Student Handouts 9 and 15</a:t>
             </a:r>
           </a:p>
           <a:p xmlns:a="http://schemas.openxmlformats.org/drawingml/2006/main">
@@ -869,6 +959,24 @@
               <a:buNone/>
             </a:pPr>
             <a:r>
+              <a:t>- Unit 3 Appendix P is optional / teacher reference</a:t>
+            </a:r>
+          </a:p>
+          <a:p xmlns:a="http://schemas.openxmlformats.org/drawingml/2006/main">
+            <a:pPr marL="228600" marR="0" indent="0" algn="l">
+              <a:lnSpc>
+                <a:spcPct val="100000"/>
+              </a:lnSpc>
+              <a:spcBef>
+                <a:spcPts val="0"/>
+              </a:spcBef>
+              <a:spcAft>
+                <a:spcPts val="0"/>
+              </a:spcAft>
+              <a:buSzPts val="1400"/>
+              <a:buNone/>
+            </a:pPr>
+            <a:r>
               <a:t/>
             </a:r>
           </a:p>
@@ -905,7 +1013,7 @@
               <a:buNone/>
             </a:pPr>
             <a:r>
-              <a:t>Use this deck whenever a project stalls, pivots, or needs structured revision. Print each later resource in its assigned week rather than as part of the Week 6 packet.</a:t>
+              <a:t>Use selected slides whenever a project needs structured revision or a responsible pivot. Print each resource in its assigned week.</a:t>
             </a:r>
           </a:p>
         </p:txBody>
@@ -3644,7 +3752,7 @@
   </p:cSld>
   <p:clrMap bg1="lt1" tx1="dk1" bg2="dk2" tx2="lt2" accent1="accent1" accent2="accent2" accent3="accent3" accent4="accent4" accent5="accent5" accent6="accent6" hlink="hlink" folHlink="folHlink"/>
   <p:sldLayoutIdLst>
-    <p:sldLayoutId xmlns:r="http://schemas.openxmlformats.org/officeDocument/2006/relationships" id="2147483649" r:id="Rb2864328f15c44b7"/>
+    <p:sldLayoutId xmlns:r="http://schemas.openxmlformats.org/officeDocument/2006/relationships" id="2147483649" r:id="Rbeab624a4d4a49d1"/>
   </p:sldLayoutIdLst>
   <p:hf sldNum="0" hdr="0" ftr="0" dt="0"/>
   <p:txStyles>
@@ -5014,7 +5122,7 @@
           <p:nvPr/>
         </p:nvPicPr>
         <p:blipFill rotWithShape="1">
-          <a:blip xmlns:r="http://schemas.openxmlformats.org/officeDocument/2006/relationships" xmlns:a="http://schemas.openxmlformats.org/drawingml/2006/main" r:embed="R7252da33d48440b3">
+          <a:blip xmlns:r="http://schemas.openxmlformats.org/officeDocument/2006/relationships" xmlns:a="http://schemas.openxmlformats.org/drawingml/2006/main" r:embed="R86da627c138e4a2b">
             <a:alphaModFix/>
           </a:blip>
           <a:srcRect xmlns:a="http://schemas.openxmlformats.org/drawingml/2006/main" l="0" t="0" r="0" b="0"/>
@@ -5446,7 +5554,7 @@
       </p:sp>
       <p:cxnSp>
         <p:nvCxnSpPr>
-          <p:cNvPr id="252" name="Google Shape;234;p12"/>
+          <p:cNvPr id="260" name="Google Shape;234;p12"/>
           <p:cNvCxnSpPr/>
           <p:nvPr/>
         </p:nvCxnSpPr>
@@ -5535,14 +5643,14 @@
       </p:sp>
       <p:pic>
         <p:nvPicPr>
-          <p:cNvPr id="254" name="Google Shape;236;p12"/>
+          <p:cNvPr id="262" name="Google Shape;236;p12"/>
           <p:cNvPicPr>
             <a:picLocks xmlns:a="http://schemas.openxmlformats.org/drawingml/2006/main" noChangeAspect="1"/>
           </p:cNvPicPr>
           <p:nvPr/>
         </p:nvPicPr>
         <p:blipFill rotWithShape="1">
-          <a:blip xmlns:r="http://schemas.openxmlformats.org/officeDocument/2006/relationships" xmlns:a="http://schemas.openxmlformats.org/drawingml/2006/main" r:embed="R81b1a804de2f41ef">
+          <a:blip xmlns:r="http://schemas.openxmlformats.org/officeDocument/2006/relationships" xmlns:a="http://schemas.openxmlformats.org/drawingml/2006/main" r:embed="R3d3472c7be8e4537">
             <a:alphaModFix/>
           </a:blip>
           <a:srcRect xmlns:a="http://schemas.openxmlformats.org/drawingml/2006/main" l="0" t="0" r="0" b="0"/>
@@ -6729,7 +6837,7 @@
       </p:sp>
       <p:cxnSp>
         <p:nvCxnSpPr>
-          <p:cNvPr id="280" name="Google Shape;256;p13"/>
+          <p:cNvPr id="288" name="Google Shape;256;p13"/>
           <p:cNvCxnSpPr/>
           <p:nvPr/>
         </p:nvCxnSpPr>
@@ -6818,14 +6926,14 @@
       </p:sp>
       <p:pic>
         <p:nvPicPr>
-          <p:cNvPr id="282" name="Google Shape;258;p13"/>
+          <p:cNvPr id="290" name="Google Shape;258;p13"/>
           <p:cNvPicPr>
             <a:picLocks xmlns:a="http://schemas.openxmlformats.org/drawingml/2006/main" noChangeAspect="1"/>
           </p:cNvPicPr>
           <p:nvPr/>
         </p:nvPicPr>
         <p:blipFill rotWithShape="1">
-          <a:blip xmlns:r="http://schemas.openxmlformats.org/officeDocument/2006/relationships" xmlns:a="http://schemas.openxmlformats.org/drawingml/2006/main" r:embed="Rf98b51ebf1924631">
+          <a:blip xmlns:r="http://schemas.openxmlformats.org/officeDocument/2006/relationships" xmlns:a="http://schemas.openxmlformats.org/drawingml/2006/main" r:embed="R60fb9621aab64fef">
             <a:alphaModFix/>
           </a:blip>
           <a:srcRect xmlns:a="http://schemas.openxmlformats.org/drawingml/2006/main" l="0" t="0" r="0" b="0"/>
@@ -8160,7 +8268,7 @@
       </p:sp>
       <p:cxnSp>
         <p:nvCxnSpPr>
-          <p:cNvPr id="300" name="Google Shape;284;p14"/>
+          <p:cNvPr id="308" name="Google Shape;284;p14"/>
           <p:cNvCxnSpPr/>
           <p:nvPr/>
         </p:nvCxnSpPr>
@@ -8249,14 +8357,14 @@
       </p:sp>
       <p:pic>
         <p:nvPicPr>
-          <p:cNvPr id="302" name="Google Shape;286;p14"/>
+          <p:cNvPr id="310" name="Google Shape;286;p14"/>
           <p:cNvPicPr>
             <a:picLocks xmlns:a="http://schemas.openxmlformats.org/drawingml/2006/main" noChangeAspect="1"/>
           </p:cNvPicPr>
           <p:nvPr/>
         </p:nvPicPr>
         <p:blipFill rotWithShape="1">
-          <a:blip xmlns:r="http://schemas.openxmlformats.org/officeDocument/2006/relationships" xmlns:a="http://schemas.openxmlformats.org/drawingml/2006/main" r:embed="Re05e078c37524f12">
+          <a:blip xmlns:r="http://schemas.openxmlformats.org/officeDocument/2006/relationships" xmlns:a="http://schemas.openxmlformats.org/drawingml/2006/main" r:embed="R0de243f3e6f0481a">
             <a:alphaModFix/>
           </a:blip>
           <a:srcRect xmlns:a="http://schemas.openxmlformats.org/drawingml/2006/main" l="0" t="0" r="0" b="0"/>
@@ -9314,7 +9422,7 @@
       </p:sp>
       <p:cxnSp>
         <p:nvCxnSpPr>
-          <p:cNvPr id="333" name="Google Shape;304;p15"/>
+          <p:cNvPr id="358" name="Google Shape;304;p15"/>
           <p:cNvCxnSpPr/>
           <p:nvPr/>
         </p:nvCxnSpPr>
@@ -9403,14 +9511,14 @@
       </p:sp>
       <p:pic>
         <p:nvPicPr>
-          <p:cNvPr id="335" name="Google Shape;306;p15"/>
+          <p:cNvPr id="360" name="Google Shape;306;p15"/>
           <p:cNvPicPr>
             <a:picLocks xmlns:a="http://schemas.openxmlformats.org/drawingml/2006/main" noChangeAspect="1"/>
           </p:cNvPicPr>
           <p:nvPr/>
         </p:nvPicPr>
         <p:blipFill rotWithShape="1">
-          <a:blip xmlns:r="http://schemas.openxmlformats.org/officeDocument/2006/relationships" xmlns:a="http://schemas.openxmlformats.org/drawingml/2006/main" r:embed="R3f115bd7a4c642bf">
+          <a:blip xmlns:r="http://schemas.openxmlformats.org/officeDocument/2006/relationships" xmlns:a="http://schemas.openxmlformats.org/drawingml/2006/main" r:embed="Ra1bd8fd746cd49e8">
             <a:alphaModFix/>
           </a:blip>
           <a:srcRect xmlns:a="http://schemas.openxmlformats.org/drawingml/2006/main" l="0" t="0" r="0" b="0"/>
@@ -10076,7 +10184,7 @@
       </p:sp>
       <p:cxnSp>
         <p:nvCxnSpPr>
-          <p:cNvPr id="346" name="Google Shape;317;p15"/>
+          <p:cNvPr id="371" name="Google Shape;317;p15"/>
           <p:cNvCxnSpPr/>
           <p:nvPr/>
         </p:nvCxnSpPr>
@@ -10101,7 +10209,7 @@
       </p:cxnSp>
       <p:cxnSp>
         <p:nvCxnSpPr>
-          <p:cNvPr id="347" name="Google Shape;318;p15"/>
+          <p:cNvPr id="372" name="Google Shape;318;p15"/>
           <p:cNvCxnSpPr/>
           <p:nvPr/>
         </p:nvCxnSpPr>
@@ -10126,7 +10234,7 @@
       </p:cxnSp>
       <p:cxnSp>
         <p:nvCxnSpPr>
-          <p:cNvPr id="348" name="Google Shape;319;p15"/>
+          <p:cNvPr id="373" name="Google Shape;319;p15"/>
           <p:cNvCxnSpPr/>
           <p:nvPr/>
         </p:nvCxnSpPr>
@@ -10151,7 +10259,7 @@
       </p:cxnSp>
       <p:cxnSp>
         <p:nvCxnSpPr>
-          <p:cNvPr id="349" name="Google Shape;320;p15"/>
+          <p:cNvPr id="374" name="Google Shape;320;p15"/>
           <p:cNvCxnSpPr/>
           <p:nvPr/>
         </p:nvCxnSpPr>
@@ -10176,7 +10284,7 @@
       </p:cxnSp>
       <p:cxnSp>
         <p:nvCxnSpPr>
-          <p:cNvPr id="350" name="Google Shape;321;p15"/>
+          <p:cNvPr id="375" name="Google Shape;321;p15"/>
           <p:cNvCxnSpPr/>
           <p:nvPr/>
         </p:nvCxnSpPr>
@@ -10869,7 +10977,7 @@
       </p:sp>
       <p:cxnSp>
         <p:nvCxnSpPr>
-          <p:cNvPr id="358" name="Google Shape;337;p16"/>
+          <p:cNvPr id="366" name="Google Shape;337;p16"/>
           <p:cNvCxnSpPr/>
           <p:nvPr/>
         </p:nvCxnSpPr>
@@ -10958,14 +11066,14 @@
       </p:sp>
       <p:pic>
         <p:nvPicPr>
-          <p:cNvPr id="360" name="Google Shape;339;p16"/>
+          <p:cNvPr id="368" name="Google Shape;339;p16"/>
           <p:cNvPicPr>
             <a:picLocks xmlns:a="http://schemas.openxmlformats.org/drawingml/2006/main" noChangeAspect="1"/>
           </p:cNvPicPr>
           <p:nvPr/>
         </p:nvPicPr>
         <p:blipFill rotWithShape="1">
-          <a:blip xmlns:r="http://schemas.openxmlformats.org/officeDocument/2006/relationships" xmlns:a="http://schemas.openxmlformats.org/drawingml/2006/main" r:embed="R5e18453511884bd5">
+          <a:blip xmlns:r="http://schemas.openxmlformats.org/officeDocument/2006/relationships" xmlns:a="http://schemas.openxmlformats.org/drawingml/2006/main" r:embed="R85f137341ddd4333">
             <a:alphaModFix/>
           </a:blip>
           <a:srcRect xmlns:a="http://schemas.openxmlformats.org/drawingml/2006/main" l="0" t="0" r="0" b="0"/>
@@ -12100,7 +12208,7 @@
       </p:sp>
       <p:cxnSp>
         <p:nvCxnSpPr>
-          <p:cNvPr id="386" name="Google Shape;362;p17"/>
+          <p:cNvPr id="394" name="Google Shape;362;p17"/>
           <p:cNvCxnSpPr/>
           <p:nvPr/>
         </p:nvCxnSpPr>
@@ -12189,14 +12297,14 @@
       </p:sp>
       <p:pic>
         <p:nvPicPr>
-          <p:cNvPr id="388" name="Google Shape;364;p17"/>
+          <p:cNvPr id="396" name="Google Shape;364;p17"/>
           <p:cNvPicPr>
             <a:picLocks xmlns:a="http://schemas.openxmlformats.org/drawingml/2006/main" noChangeAspect="1"/>
           </p:cNvPicPr>
           <p:nvPr/>
         </p:nvPicPr>
         <p:blipFill rotWithShape="1">
-          <a:blip xmlns:r="http://schemas.openxmlformats.org/officeDocument/2006/relationships" xmlns:a="http://schemas.openxmlformats.org/drawingml/2006/main" r:embed="R7a51ed296f1742fc">
+          <a:blip xmlns:r="http://schemas.openxmlformats.org/officeDocument/2006/relationships" xmlns:a="http://schemas.openxmlformats.org/drawingml/2006/main" r:embed="Raaf7265b01174914">
             <a:alphaModFix/>
           </a:blip>
           <a:srcRect xmlns:a="http://schemas.openxmlformats.org/drawingml/2006/main" l="0" t="0" r="0" b="0"/>
@@ -13524,7 +13632,7 @@
       </p:sp>
       <p:cxnSp>
         <p:nvCxnSpPr>
-          <p:cNvPr id="409" name="Google Shape;390;p18"/>
+          <p:cNvPr id="417" name="Google Shape;390;p18"/>
           <p:cNvCxnSpPr/>
           <p:nvPr/>
         </p:nvCxnSpPr>
@@ -13613,14 +13721,14 @@
       </p:sp>
       <p:pic>
         <p:nvPicPr>
-          <p:cNvPr id="411" name="Google Shape;392;p18"/>
+          <p:cNvPr id="419" name="Google Shape;392;p18"/>
           <p:cNvPicPr>
             <a:picLocks xmlns:a="http://schemas.openxmlformats.org/drawingml/2006/main" noChangeAspect="1"/>
           </p:cNvPicPr>
           <p:nvPr/>
         </p:nvPicPr>
         <p:blipFill rotWithShape="1">
-          <a:blip xmlns:r="http://schemas.openxmlformats.org/officeDocument/2006/relationships" xmlns:a="http://schemas.openxmlformats.org/drawingml/2006/main" r:embed="R50ac8dfa746748bc">
+          <a:blip xmlns:r="http://schemas.openxmlformats.org/officeDocument/2006/relationships" xmlns:a="http://schemas.openxmlformats.org/drawingml/2006/main" r:embed="R09284115c9044089">
             <a:alphaModFix/>
           </a:blip>
           <a:srcRect xmlns:a="http://schemas.openxmlformats.org/drawingml/2006/main" l="0" t="0" r="0" b="0"/>
@@ -14749,7 +14857,7 @@
       </p:sp>
       <p:cxnSp>
         <p:nvCxnSpPr>
-          <p:cNvPr id="434" name="Google Shape;413;p19"/>
+          <p:cNvPr id="442" name="Google Shape;413;p19"/>
           <p:cNvCxnSpPr/>
           <p:nvPr/>
         </p:nvCxnSpPr>
@@ -14838,14 +14946,14 @@
       </p:sp>
       <p:pic>
         <p:nvPicPr>
-          <p:cNvPr id="436" name="Google Shape;415;p19"/>
+          <p:cNvPr id="444" name="Google Shape;415;p19"/>
           <p:cNvPicPr>
             <a:picLocks xmlns:a="http://schemas.openxmlformats.org/drawingml/2006/main" noChangeAspect="1"/>
           </p:cNvPicPr>
           <p:nvPr/>
         </p:nvPicPr>
         <p:blipFill rotWithShape="1">
-          <a:blip xmlns:r="http://schemas.openxmlformats.org/officeDocument/2006/relationships" xmlns:a="http://schemas.openxmlformats.org/drawingml/2006/main" r:embed="R3c160b0ef5f84522">
+          <a:blip xmlns:r="http://schemas.openxmlformats.org/officeDocument/2006/relationships" xmlns:a="http://schemas.openxmlformats.org/drawingml/2006/main" r:embed="Re8af84399ea44952">
             <a:alphaModFix/>
           </a:blip>
           <a:srcRect xmlns:a="http://schemas.openxmlformats.org/drawingml/2006/main" l="0" t="0" r="0" b="0"/>
@@ -16108,14 +16216,14 @@
       </p:sp>
       <p:pic>
         <p:nvPicPr>
-          <p:cNvPr id="451" name="Google Shape;439;p20"/>
+          <p:cNvPr id="462" name="Google Shape;439;p20"/>
           <p:cNvPicPr>
             <a:picLocks xmlns:a="http://schemas.openxmlformats.org/drawingml/2006/main" noChangeAspect="1"/>
           </p:cNvPicPr>
           <p:nvPr/>
         </p:nvPicPr>
         <p:blipFill rotWithShape="1">
-          <a:blip xmlns:r="http://schemas.openxmlformats.org/officeDocument/2006/relationships" xmlns:a="http://schemas.openxmlformats.org/drawingml/2006/main" r:embed="R0a3d6303f54b4253">
+          <a:blip xmlns:r="http://schemas.openxmlformats.org/officeDocument/2006/relationships" xmlns:a="http://schemas.openxmlformats.org/drawingml/2006/main" r:embed="Rdab97f0bac524d6d">
             <a:alphaModFix/>
           </a:blip>
           <a:srcRect xmlns:a="http://schemas.openxmlformats.org/drawingml/2006/main" l="0" t="0" r="0" b="0"/>
@@ -16136,7 +16244,7 @@
       </p:pic>
       <p:cxnSp>
         <p:nvCxnSpPr>
-          <p:cNvPr id="452" name="Google Shape;440;p20"/>
+          <p:cNvPr id="463" name="Google Shape;440;p20"/>
           <p:cNvCxnSpPr/>
           <p:nvPr/>
         </p:nvCxnSpPr>
@@ -16225,14 +16333,14 @@
       </p:sp>
       <p:pic>
         <p:nvPicPr>
-          <p:cNvPr id="454" name="Google Shape;442;p20"/>
+          <p:cNvPr id="465" name="Google Shape;442;p20"/>
           <p:cNvPicPr>
             <a:picLocks xmlns:a="http://schemas.openxmlformats.org/drawingml/2006/main" noChangeAspect="1"/>
           </p:cNvPicPr>
           <p:nvPr/>
         </p:nvPicPr>
         <p:blipFill rotWithShape="1">
-          <a:blip xmlns:r="http://schemas.openxmlformats.org/officeDocument/2006/relationships" xmlns:a="http://schemas.openxmlformats.org/drawingml/2006/main" r:embed="R0a3d6303f54b4253">
+          <a:blip xmlns:r="http://schemas.openxmlformats.org/officeDocument/2006/relationships" xmlns:a="http://schemas.openxmlformats.org/drawingml/2006/main" r:embed="Rdab97f0bac524d6d">
             <a:alphaModFix/>
           </a:blip>
           <a:srcRect xmlns:a="http://schemas.openxmlformats.org/drawingml/2006/main" l="0" t="0" r="0" b="0"/>
@@ -16664,7 +16772,7 @@
       </p:sp>
       <p:cxnSp>
         <p:nvCxnSpPr>
-          <p:cNvPr id="51" name="Google Shape;34;p4"/>
+          <p:cNvPr id="67" name="Google Shape;34;p4"/>
           <p:cNvCxnSpPr/>
           <p:nvPr/>
         </p:nvCxnSpPr>
@@ -16753,14 +16861,14 @@
       </p:sp>
       <p:pic>
         <p:nvPicPr>
-          <p:cNvPr id="53" name="Google Shape;36;p4"/>
+          <p:cNvPr id="69" name="Google Shape;36;p4"/>
           <p:cNvPicPr>
             <a:picLocks xmlns:a="http://schemas.openxmlformats.org/drawingml/2006/main" noChangeAspect="1"/>
           </p:cNvPicPr>
           <p:nvPr/>
         </p:nvPicPr>
         <p:blipFill rotWithShape="1">
-          <a:blip xmlns:r="http://schemas.openxmlformats.org/officeDocument/2006/relationships" xmlns:a="http://schemas.openxmlformats.org/drawingml/2006/main" r:embed="Rc5e2a3ffb4b5471b">
+          <a:blip xmlns:r="http://schemas.openxmlformats.org/officeDocument/2006/relationships" xmlns:a="http://schemas.openxmlformats.org/drawingml/2006/main" r:embed="R75bab845dbef4294">
             <a:alphaModFix/>
           </a:blip>
           <a:srcRect xmlns:a="http://schemas.openxmlformats.org/drawingml/2006/main" l="0" t="0" r="0" b="0"/>
@@ -17163,7 +17271,7 @@
       </p:sp>
       <p:cxnSp>
         <p:nvCxnSpPr>
-          <p:cNvPr id="59" name="Google Shape;42;p4"/>
+          <p:cNvPr id="75" name="Google Shape;42;p4"/>
           <p:cNvCxnSpPr/>
           <p:nvPr/>
         </p:nvCxnSpPr>
@@ -17663,7 +17771,7 @@
       </p:sp>
       <p:cxnSp>
         <p:nvCxnSpPr>
-          <p:cNvPr id="73" name="Google Shape;55;p5"/>
+          <p:cNvPr id="84" name="Google Shape;55;p5"/>
           <p:cNvCxnSpPr/>
           <p:nvPr/>
         </p:nvCxnSpPr>
@@ -17752,14 +17860,14 @@
       </p:sp>
       <p:pic>
         <p:nvPicPr>
-          <p:cNvPr id="75" name="Google Shape;57;p5"/>
+          <p:cNvPr id="86" name="Google Shape;57;p5"/>
           <p:cNvPicPr>
             <a:picLocks xmlns:a="http://schemas.openxmlformats.org/drawingml/2006/main" noChangeAspect="1"/>
           </p:cNvPicPr>
           <p:nvPr/>
         </p:nvPicPr>
         <p:blipFill rotWithShape="1">
-          <a:blip xmlns:r="http://schemas.openxmlformats.org/officeDocument/2006/relationships" xmlns:a="http://schemas.openxmlformats.org/drawingml/2006/main" r:embed="Rf48ff0088fb14138">
+          <a:blip xmlns:r="http://schemas.openxmlformats.org/officeDocument/2006/relationships" xmlns:a="http://schemas.openxmlformats.org/drawingml/2006/main" r:embed="R9ea93463c3684613">
             <a:alphaModFix/>
           </a:blip>
           <a:srcRect xmlns:a="http://schemas.openxmlformats.org/drawingml/2006/main" l="0" t="0" r="0" b="0"/>
@@ -17780,7 +17888,7 @@
       </p:pic>
       <p:cxnSp>
         <p:nvCxnSpPr>
-          <p:cNvPr id="76" name="Google Shape;58;p5"/>
+          <p:cNvPr id="87" name="Google Shape;58;p5"/>
           <p:cNvCxnSpPr/>
           <p:nvPr/>
         </p:nvCxnSpPr>
@@ -18817,7 +18925,7 @@
       </p:sp>
       <p:cxnSp>
         <p:nvCxnSpPr>
-          <p:cNvPr id="105" name="Google Shape;77;p6"/>
+          <p:cNvPr id="113" name="Google Shape;77;p6"/>
           <p:cNvCxnSpPr/>
           <p:nvPr/>
         </p:nvCxnSpPr>
@@ -18906,14 +19014,14 @@
       </p:sp>
       <p:pic>
         <p:nvPicPr>
-          <p:cNvPr id="107" name="Google Shape;79;p6"/>
+          <p:cNvPr id="115" name="Google Shape;79;p6"/>
           <p:cNvPicPr>
             <a:picLocks xmlns:a="http://schemas.openxmlformats.org/drawingml/2006/main" noChangeAspect="1"/>
           </p:cNvPicPr>
           <p:nvPr/>
         </p:nvPicPr>
         <p:blipFill rotWithShape="1">
-          <a:blip xmlns:r="http://schemas.openxmlformats.org/officeDocument/2006/relationships" xmlns:a="http://schemas.openxmlformats.org/drawingml/2006/main" r:embed="Ra21107f7ffb74c96">
+          <a:blip xmlns:r="http://schemas.openxmlformats.org/officeDocument/2006/relationships" xmlns:a="http://schemas.openxmlformats.org/drawingml/2006/main" r:embed="R67713d1ce51742dd">
             <a:alphaModFix/>
           </a:blip>
           <a:srcRect xmlns:a="http://schemas.openxmlformats.org/drawingml/2006/main" l="0" t="0" r="0" b="0"/>
@@ -20503,7 +20611,7 @@
       </p:sp>
       <p:cxnSp>
         <p:nvCxnSpPr>
-          <p:cNvPr id="140" name="Google Shape;109;p7"/>
+          <p:cNvPr id="165" name="Google Shape;109;p7"/>
           <p:cNvCxnSpPr/>
           <p:nvPr/>
         </p:nvCxnSpPr>
@@ -20592,14 +20700,14 @@
       </p:sp>
       <p:pic>
         <p:nvPicPr>
-          <p:cNvPr id="142" name="Google Shape;111;p7"/>
+          <p:cNvPr id="167" name="Google Shape;111;p7"/>
           <p:cNvPicPr>
             <a:picLocks xmlns:a="http://schemas.openxmlformats.org/drawingml/2006/main" noChangeAspect="1"/>
           </p:cNvPicPr>
           <p:nvPr/>
         </p:nvPicPr>
         <p:blipFill rotWithShape="1">
-          <a:blip xmlns:r="http://schemas.openxmlformats.org/officeDocument/2006/relationships" xmlns:a="http://schemas.openxmlformats.org/drawingml/2006/main" r:embed="Rf57ca65675ca4c40">
+          <a:blip xmlns:r="http://schemas.openxmlformats.org/officeDocument/2006/relationships" xmlns:a="http://schemas.openxmlformats.org/drawingml/2006/main" r:embed="R48d9052afe094c55">
             <a:alphaModFix/>
           </a:blip>
           <a:srcRect xmlns:a="http://schemas.openxmlformats.org/drawingml/2006/main" l="0" t="0" r="0" b="0"/>
@@ -20875,7 +20983,7 @@
       </p:sp>
       <p:cxnSp>
         <p:nvCxnSpPr>
-          <p:cNvPr id="147" name="Google Shape;116;p7"/>
+          <p:cNvPr id="172" name="Google Shape;116;p7"/>
           <p:cNvCxnSpPr/>
           <p:nvPr/>
         </p:nvCxnSpPr>
@@ -21155,7 +21263,7 @@
       </p:sp>
       <p:cxnSp>
         <p:nvCxnSpPr>
-          <p:cNvPr id="152" name="Google Shape;121;p7"/>
+          <p:cNvPr id="177" name="Google Shape;121;p7"/>
           <p:cNvCxnSpPr/>
           <p:nvPr/>
         </p:nvCxnSpPr>
@@ -21435,7 +21543,7 @@
       </p:sp>
       <p:cxnSp>
         <p:nvCxnSpPr>
-          <p:cNvPr id="157" name="Google Shape;126;p7"/>
+          <p:cNvPr id="182" name="Google Shape;126;p7"/>
           <p:cNvCxnSpPr/>
           <p:nvPr/>
         </p:nvCxnSpPr>
@@ -22255,7 +22363,7 @@
       </p:sp>
       <p:cxnSp>
         <p:nvCxnSpPr>
-          <p:cNvPr id="160" name="Google Shape;144;p8"/>
+          <p:cNvPr id="168" name="Google Shape;144;p8"/>
           <p:cNvCxnSpPr/>
           <p:nvPr/>
         </p:nvCxnSpPr>
@@ -22344,14 +22452,14 @@
       </p:sp>
       <p:pic>
         <p:nvPicPr>
-          <p:cNvPr id="162" name="Google Shape;146;p8"/>
+          <p:cNvPr id="170" name="Google Shape;146;p8"/>
           <p:cNvPicPr>
             <a:picLocks xmlns:a="http://schemas.openxmlformats.org/drawingml/2006/main" noChangeAspect="1"/>
           </p:cNvPicPr>
           <p:nvPr/>
         </p:nvPicPr>
         <p:blipFill rotWithShape="1">
-          <a:blip xmlns:r="http://schemas.openxmlformats.org/officeDocument/2006/relationships" xmlns:a="http://schemas.openxmlformats.org/drawingml/2006/main" r:embed="R996bb42835d5406f">
+          <a:blip xmlns:r="http://schemas.openxmlformats.org/officeDocument/2006/relationships" xmlns:a="http://schemas.openxmlformats.org/drawingml/2006/main" r:embed="Rac51b8b864564769">
             <a:alphaModFix/>
           </a:blip>
           <a:srcRect xmlns:a="http://schemas.openxmlformats.org/drawingml/2006/main" l="0" t="0" r="0" b="0"/>
@@ -23349,7 +23457,7 @@
       </p:sp>
       <p:cxnSp>
         <p:nvCxnSpPr>
-          <p:cNvPr id="188" name="Google Shape;164;p9"/>
+          <p:cNvPr id="196" name="Google Shape;164;p9"/>
           <p:cNvCxnSpPr/>
           <p:nvPr/>
         </p:nvCxnSpPr>
@@ -23438,14 +23546,14 @@
       </p:sp>
       <p:pic>
         <p:nvPicPr>
-          <p:cNvPr id="190" name="Google Shape;166;p9"/>
+          <p:cNvPr id="198" name="Google Shape;166;p9"/>
           <p:cNvPicPr>
             <a:picLocks xmlns:a="http://schemas.openxmlformats.org/drawingml/2006/main" noChangeAspect="1"/>
           </p:cNvPicPr>
           <p:nvPr/>
         </p:nvPicPr>
         <p:blipFill rotWithShape="1">
-          <a:blip xmlns:r="http://schemas.openxmlformats.org/officeDocument/2006/relationships" xmlns:a="http://schemas.openxmlformats.org/drawingml/2006/main" r:embed="R9e859792022448f6">
+          <a:blip xmlns:r="http://schemas.openxmlformats.org/officeDocument/2006/relationships" xmlns:a="http://schemas.openxmlformats.org/drawingml/2006/main" r:embed="R3ff752d976f746d9">
             <a:alphaModFix/>
           </a:blip>
           <a:srcRect xmlns:a="http://schemas.openxmlformats.org/drawingml/2006/main" l="0" t="0" r="0" b="0"/>
@@ -24775,7 +24883,7 @@
       </p:sp>
       <p:cxnSp>
         <p:nvCxnSpPr>
-          <p:cNvPr id="208" name="Google Shape;192;p10"/>
+          <p:cNvPr id="216" name="Google Shape;192;p10"/>
           <p:cNvCxnSpPr/>
           <p:nvPr/>
         </p:nvCxnSpPr>
@@ -24864,14 +24972,14 @@
       </p:sp>
       <p:pic>
         <p:nvPicPr>
-          <p:cNvPr id="210" name="Google Shape;194;p10"/>
+          <p:cNvPr id="218" name="Google Shape;194;p10"/>
           <p:cNvPicPr>
             <a:picLocks xmlns:a="http://schemas.openxmlformats.org/drawingml/2006/main" noChangeAspect="1"/>
           </p:cNvPicPr>
           <p:nvPr/>
         </p:nvPicPr>
         <p:blipFill rotWithShape="1">
-          <a:blip xmlns:r="http://schemas.openxmlformats.org/officeDocument/2006/relationships" xmlns:a="http://schemas.openxmlformats.org/drawingml/2006/main" r:embed="Rb30f684b6bf9439d">
+          <a:blip xmlns:r="http://schemas.openxmlformats.org/officeDocument/2006/relationships" xmlns:a="http://schemas.openxmlformats.org/drawingml/2006/main" r:embed="Re13810c2c9e04b92">
             <a:alphaModFix/>
           </a:blip>
           <a:srcRect xmlns:a="http://schemas.openxmlformats.org/drawingml/2006/main" l="0" t="0" r="0" b="0"/>
@@ -25929,7 +26037,7 @@
       </p:sp>
       <p:cxnSp>
         <p:nvCxnSpPr>
-          <p:cNvPr id="230" name="Google Shape;212;p11"/>
+          <p:cNvPr id="238" name="Google Shape;212;p11"/>
           <p:cNvCxnSpPr/>
           <p:nvPr/>
         </p:nvCxnSpPr>
@@ -26018,14 +26126,14 @@
       </p:sp>
       <p:pic>
         <p:nvPicPr>
-          <p:cNvPr id="232" name="Google Shape;214;p11"/>
+          <p:cNvPr id="240" name="Google Shape;214;p11"/>
           <p:cNvPicPr>
             <a:picLocks xmlns:a="http://schemas.openxmlformats.org/drawingml/2006/main" noChangeAspect="1"/>
           </p:cNvPicPr>
           <p:nvPr/>
         </p:nvPicPr>
         <p:blipFill rotWithShape="1">
-          <a:blip xmlns:r="http://schemas.openxmlformats.org/officeDocument/2006/relationships" xmlns:a="http://schemas.openxmlformats.org/drawingml/2006/main" r:embed="R97a25b087a884549">
+          <a:blip xmlns:r="http://schemas.openxmlformats.org/officeDocument/2006/relationships" xmlns:a="http://schemas.openxmlformats.org/drawingml/2006/main" r:embed="R0d6fb39566004040">
             <a:alphaModFix/>
           </a:blip>
           <a:srcRect xmlns:a="http://schemas.openxmlformats.org/drawingml/2006/main" l="0" t="0" r="0" b="0"/>
